--- a/assets/pptx/catalog-614.pptx
+++ b/assets/pptx/catalog-614.pptx
@@ -3388,7 +3388,7 @@
                 <a:ea typeface="Ebrima"/>
                 <a:cs typeface="Ebrima"/>
               </a:rPr>
-              <a:t>ደግሞ ታምራትህ በዛ በየእለቱ (2x)</a:t>
+              <a:t>ደግሞ ታምራትህ በዛ በየእለቱ 2x</a:t>
             </a:r>
           </a:p>
           <a:p>
@@ -3442,7 +3442,7 @@
                 <a:ea typeface="Ebrima"/>
                 <a:cs typeface="Ebrima"/>
               </a:rPr>
-              <a:t>ዝም አያሰኘኝም (2x)</a:t>
+              <a:t>ዝም አያሰኘኝም 2x</a:t>
             </a:r>
           </a:p>
         </p:txBody>
@@ -3599,7 +3599,7 @@
                 <a:ea typeface="Ebrima"/>
                 <a:cs typeface="Ebrima"/>
               </a:rPr>
-              <a:t>በእውነት አንተ ንጉስ ነህ አምልኮዬም ይድረስህ (2x)</a:t>
+              <a:t>በእውነት አንተ ንጉስ ነህ አምልኮዬም ይድረስህ 2x</a:t>
             </a:r>
           </a:p>
         </p:txBody>
@@ -3684,7 +3684,7 @@
                 <a:ea typeface="Ebrima"/>
                 <a:cs typeface="Ebrima"/>
               </a:rPr>
-              <a:t>ድንቅን እየሰራህ ለምታኖረን (2x)</a:t>
+              <a:t>ድንቅን እየሰራህ ለምታኖረን 2x</a:t>
             </a:r>
           </a:p>
           <a:p>
@@ -3738,7 +3738,7 @@
                 <a:ea typeface="Ebrima"/>
                 <a:cs typeface="Ebrima"/>
               </a:rPr>
-              <a:t>ክመታወቅ ያልፋል (2x)</a:t>
+              <a:t>ክመታወቅ ያልፋል 2x</a:t>
             </a:r>
           </a:p>
         </p:txBody>
@@ -3895,7 +3895,7 @@
                 <a:ea typeface="Ebrima"/>
                 <a:cs typeface="Ebrima"/>
               </a:rPr>
-              <a:t>በእውነት አንተ ንጉስ ነህ አምልኮዬም ይድረስህ (2x)</a:t>
+              <a:t>በእውነት አንተ ንጉስ ነህ አምልኮዬም ይድረስህ 2x</a:t>
             </a:r>
           </a:p>
         </p:txBody>
@@ -3980,7 +3980,7 @@
                 <a:ea typeface="Ebrima"/>
                 <a:cs typeface="Ebrima"/>
               </a:rPr>
-              <a:t>እባርክሃለሁ ክበር መድኃኒቴ (2x)</a:t>
+              <a:t>እባርክሃለሁ ክበር መድኃኒቴ 2x</a:t>
             </a:r>
           </a:p>
           <a:p>
@@ -4034,7 +4034,7 @@
                 <a:ea typeface="Ebrima"/>
                 <a:cs typeface="Ebrima"/>
               </a:rPr>
-              <a:t>በፊትህ ላሰማ (2x)</a:t>
+              <a:t>በፊትህ ላሰማ 2x</a:t>
             </a:r>
           </a:p>
         </p:txBody>
@@ -4191,7 +4191,7 @@
                 <a:ea typeface="Ebrima"/>
                 <a:cs typeface="Ebrima"/>
               </a:rPr>
-              <a:t>በእውነት አንተ ንጉስ ነህ አምልኮዬም ይድረስህ (2x)</a:t>
+              <a:t>በእውነት አንተ ንጉስ ነህ አምልኮዬም ይድረስህ 2x</a:t>
             </a:r>
           </a:p>
         </p:txBody>
@@ -4276,7 +4276,7 @@
                 <a:ea typeface="Ebrima"/>
                 <a:cs typeface="Ebrima"/>
               </a:rPr>
-              <a:t>ደግሞ ታምራትህ በዛ በየእለቱ (2x)</a:t>
+              <a:t>ደግሞ ታምራትህ በዛ በየእለቱ 2x</a:t>
             </a:r>
           </a:p>
           <a:p>
@@ -4312,7 +4312,7 @@
                 <a:ea typeface="Ebrima"/>
                 <a:cs typeface="Ebrima"/>
               </a:rPr>
-              <a:t>ውስጤ የገባው ፍቅርህ ዝም አያሰኘኝም (2x)</a:t>
+              <a:t>ውስጤ የገባው ፍቅርህ ዝም አያሰኘኝም 2x</a:t>
             </a:r>
           </a:p>
         </p:txBody>
@@ -4397,7 +4397,7 @@
                 <a:ea typeface="Ebrima"/>
                 <a:cs typeface="Ebrima"/>
               </a:rPr>
-              <a:t>ድንቅን እየሰራህ ለምታኖረን (2x)</a:t>
+              <a:t>ድንቅን እየሰራህ ለምታኖረን 2x</a:t>
             </a:r>
           </a:p>
           <a:p>
@@ -4433,7 +4433,7 @@
                 <a:ea typeface="Ebrima"/>
                 <a:cs typeface="Ebrima"/>
               </a:rPr>
-              <a:t>ጌታ ያንተ ፍቅር ክመታወቅ ያልፋል (2x)</a:t>
+              <a:t>ጌታ ያንተ ፍቅር ክመታወቅ ያልፋል 2x</a:t>
             </a:r>
           </a:p>
         </p:txBody>
